--- a/ProyectoFinal/ProyectoFinal - AgendaContactos.pptx
+++ b/ProyectoFinal/ProyectoFinal - AgendaContactos.pptx
@@ -1,24 +1,24 @@
 
 <file path=ppt/presentation.xml><?xml version="1.0" encoding="utf-8"?>
-<p:presentation xmlns:a="http://schemas.openxmlformats.org/drawingml/2006/main" xmlns:r="http://schemas.openxmlformats.org/officeDocument/2006/relationships" xmlns:p="http://schemas.openxmlformats.org/presentationml/2006/main" saveSubsetFonts="1" embedTrueTypeFonts="true">
+<p:presentation xmlns:a="http://schemas.openxmlformats.org/drawingml/2006/main" xmlns:r="http://schemas.openxmlformats.org/officeDocument/2006/relationships" xmlns:p="http://schemas.openxmlformats.org/presentationml/2006/main" embedTrueTypeFonts="1" saveSubsetFonts="1">
   <p:sldMasterIdLst>
     <p:sldMasterId id="2147483648" r:id="rId1"/>
   </p:sldMasterIdLst>
   <p:sldIdLst>
-    <p:sldId id="256" r:id="rId6"/>
-    <p:sldId id="257" r:id="rId7"/>
-    <p:sldId id="258" r:id="rId8"/>
-    <p:sldId id="259" r:id="rId9"/>
-    <p:sldId id="260" r:id="rId10"/>
-    <p:sldId id="261" r:id="rId11"/>
-    <p:sldId id="262" r:id="rId12"/>
+    <p:sldId id="256" r:id="rId2"/>
+    <p:sldId id="257" r:id="rId3"/>
+    <p:sldId id="258" r:id="rId4"/>
+    <p:sldId id="259" r:id="rId5"/>
+    <p:sldId id="260" r:id="rId6"/>
+    <p:sldId id="261" r:id="rId7"/>
+    <p:sldId id="262" r:id="rId8"/>
   </p:sldIdLst>
   <p:sldSz cx="18288000" cy="10287000"/>
   <p:notesSz cx="6858000" cy="9144000"/>
   <p:embeddedFontLst>
     <p:embeddedFont>
-      <p:font typeface="Courier Prime" charset="1" panose="00000509000000000000"/>
-      <p:regular r:id="rId13"/>
+      <p:font typeface="Courier Prime" panose="020B0604020202020204" charset="0"/>
+      <p:regular r:id="rId9"/>
     </p:embeddedFont>
   </p:embeddedFontLst>
   <p:defaultTextStyle>
@@ -116,6 +116,22 @@
       </a:defRPr>
     </a:lvl9pPr>
   </p:defaultTextStyle>
+  <p:extLst>
+    <p:ext uri="{EFAFB233-063F-42B5-8137-9DF3F51BA10A}">
+      <p15:sldGuideLst xmlns:p15="http://schemas.microsoft.com/office/powerpoint/2012/main">
+        <p15:guide id="1" orient="horz" pos="2160">
+          <p15:clr>
+            <a:srgbClr val="A4A3A4"/>
+          </p15:clr>
+        </p15:guide>
+        <p15:guide id="2" pos="2880">
+          <p15:clr>
+            <a:srgbClr val="A4A3A4"/>
+          </p15:clr>
+        </p15:guide>
+      </p15:sldGuideLst>
+    </p:ext>
+  </p:extLst>
 </p:presentation>
 </file>
 
@@ -157,10 +173,9 @@
           <a:lstStyle/>
           <a:p>
             <a:r>
-              <a:rPr lang="en-US" smtClean="0"/>
+              <a:rPr lang="en-US"/>
               <a:t>Click to edit Master title style</a:t>
             </a:r>
-            <a:endParaRPr lang="en-US"/>
           </a:p>
         </p:txBody>
       </p:sp>
@@ -276,10 +291,9 @@
           </a:lstStyle>
           <a:p>
             <a:r>
-              <a:rPr lang="en-US" smtClean="0"/>
+              <a:rPr lang="en-US"/>
               <a:t>Click to edit Master subtitle style</a:t>
             </a:r>
-            <a:endParaRPr lang="en-US"/>
           </a:p>
         </p:txBody>
       </p:sp>
@@ -301,7 +315,7 @@
             <a:fld id="{1D8BD707-D9CF-40AE-B4C6-C98DA3205C09}" type="datetimeFigureOut">
               <a:rPr lang="en-US" smtClean="0"/>
               <a:pPr/>
-              <a:t>8/1/2011</a:t>
+              <a:t>12/15/2025</a:t>
             </a:fld>
             <a:endParaRPr lang="en-US"/>
           </a:p>
@@ -344,7 +358,7 @@
             <a:fld id="{B6F15528-21DE-4FAA-801E-634DDDAF4B2B}" type="slidenum">
               <a:rPr lang="en-US" smtClean="0"/>
               <a:pPr/>
-              <a:t>‹#›</a:t>
+              <a:t>‹Nº›</a:t>
             </a:fld>
             <a:endParaRPr lang="en-US"/>
           </a:p>
@@ -391,10 +405,9 @@
           <a:lstStyle/>
           <a:p>
             <a:r>
-              <a:rPr lang="en-US" smtClean="0"/>
+              <a:rPr lang="en-US"/>
               <a:t>Click to edit Master title style</a:t>
             </a:r>
-            <a:endParaRPr lang="en-US"/>
           </a:p>
         </p:txBody>
       </p:sp>
@@ -415,38 +428,37 @@
           <a:p>
             <a:pPr lvl="0"/>
             <a:r>
-              <a:rPr lang="en-US" smtClean="0"/>
+              <a:rPr lang="en-US"/>
               <a:t>Click to edit Master text styles</a:t>
             </a:r>
           </a:p>
           <a:p>
             <a:pPr lvl="1"/>
             <a:r>
-              <a:rPr lang="en-US" smtClean="0"/>
+              <a:rPr lang="en-US"/>
               <a:t>Second level</a:t>
             </a:r>
           </a:p>
           <a:p>
             <a:pPr lvl="2"/>
             <a:r>
-              <a:rPr lang="en-US" smtClean="0"/>
+              <a:rPr lang="en-US"/>
               <a:t>Third level</a:t>
             </a:r>
           </a:p>
           <a:p>
             <a:pPr lvl="3"/>
             <a:r>
-              <a:rPr lang="en-US" smtClean="0"/>
+              <a:rPr lang="en-US"/>
               <a:t>Fourth level</a:t>
             </a:r>
           </a:p>
           <a:p>
             <a:pPr lvl="4"/>
             <a:r>
-              <a:rPr lang="en-US" smtClean="0"/>
+              <a:rPr lang="en-US"/>
               <a:t>Fifth level</a:t>
             </a:r>
-            <a:endParaRPr lang="en-US"/>
           </a:p>
         </p:txBody>
       </p:sp>
@@ -468,7 +480,7 @@
             <a:fld id="{1D8BD707-D9CF-40AE-B4C6-C98DA3205C09}" type="datetimeFigureOut">
               <a:rPr lang="en-US" smtClean="0"/>
               <a:pPr/>
-              <a:t>8/1/2011</a:t>
+              <a:t>12/15/2025</a:t>
             </a:fld>
             <a:endParaRPr lang="en-US"/>
           </a:p>
@@ -511,7 +523,7 @@
             <a:fld id="{B6F15528-21DE-4FAA-801E-634DDDAF4B2B}" type="slidenum">
               <a:rPr lang="en-US" smtClean="0"/>
               <a:pPr/>
-              <a:t>‹#›</a:t>
+              <a:t>‹Nº›</a:t>
             </a:fld>
             <a:endParaRPr lang="en-US"/>
           </a:p>
@@ -563,10 +575,9 @@
           <a:lstStyle/>
           <a:p>
             <a:r>
-              <a:rPr lang="en-US" smtClean="0"/>
+              <a:rPr lang="en-US"/>
               <a:t>Click to edit Master title style</a:t>
             </a:r>
-            <a:endParaRPr lang="en-US"/>
           </a:p>
         </p:txBody>
       </p:sp>
@@ -592,38 +603,37 @@
           <a:p>
             <a:pPr lvl="0"/>
             <a:r>
-              <a:rPr lang="en-US" smtClean="0"/>
+              <a:rPr lang="en-US"/>
               <a:t>Click to edit Master text styles</a:t>
             </a:r>
           </a:p>
           <a:p>
             <a:pPr lvl="1"/>
             <a:r>
-              <a:rPr lang="en-US" smtClean="0"/>
+              <a:rPr lang="en-US"/>
               <a:t>Second level</a:t>
             </a:r>
           </a:p>
           <a:p>
             <a:pPr lvl="2"/>
             <a:r>
-              <a:rPr lang="en-US" smtClean="0"/>
+              <a:rPr lang="en-US"/>
               <a:t>Third level</a:t>
             </a:r>
           </a:p>
           <a:p>
             <a:pPr lvl="3"/>
             <a:r>
-              <a:rPr lang="en-US" smtClean="0"/>
+              <a:rPr lang="en-US"/>
               <a:t>Fourth level</a:t>
             </a:r>
           </a:p>
           <a:p>
             <a:pPr lvl="4"/>
             <a:r>
-              <a:rPr lang="en-US" smtClean="0"/>
+              <a:rPr lang="en-US"/>
               <a:t>Fifth level</a:t>
             </a:r>
-            <a:endParaRPr lang="en-US"/>
           </a:p>
         </p:txBody>
       </p:sp>
@@ -645,7 +655,7 @@
             <a:fld id="{1D8BD707-D9CF-40AE-B4C6-C98DA3205C09}" type="datetimeFigureOut">
               <a:rPr lang="en-US" smtClean="0"/>
               <a:pPr/>
-              <a:t>8/1/2011</a:t>
+              <a:t>12/15/2025</a:t>
             </a:fld>
             <a:endParaRPr lang="en-US"/>
           </a:p>
@@ -688,7 +698,7 @@
             <a:fld id="{B6F15528-21DE-4FAA-801E-634DDDAF4B2B}" type="slidenum">
               <a:rPr lang="en-US" smtClean="0"/>
               <a:pPr/>
-              <a:t>‹#›</a:t>
+              <a:t>‹Nº›</a:t>
             </a:fld>
             <a:endParaRPr lang="en-US"/>
           </a:p>
@@ -735,10 +745,9 @@
           <a:lstStyle/>
           <a:p>
             <a:r>
-              <a:rPr lang="en-US" smtClean="0"/>
+              <a:rPr lang="en-US"/>
               <a:t>Click to edit Master title style</a:t>
             </a:r>
-            <a:endParaRPr lang="en-US"/>
           </a:p>
         </p:txBody>
       </p:sp>
@@ -759,38 +768,37 @@
           <a:p>
             <a:pPr lvl="0"/>
             <a:r>
-              <a:rPr lang="en-US" smtClean="0"/>
+              <a:rPr lang="en-US"/>
               <a:t>Click to edit Master text styles</a:t>
             </a:r>
           </a:p>
           <a:p>
             <a:pPr lvl="1"/>
             <a:r>
-              <a:rPr lang="en-US" smtClean="0"/>
+              <a:rPr lang="en-US"/>
               <a:t>Second level</a:t>
             </a:r>
           </a:p>
           <a:p>
             <a:pPr lvl="2"/>
             <a:r>
-              <a:rPr lang="en-US" smtClean="0"/>
+              <a:rPr lang="en-US"/>
               <a:t>Third level</a:t>
             </a:r>
           </a:p>
           <a:p>
             <a:pPr lvl="3"/>
             <a:r>
-              <a:rPr lang="en-US" smtClean="0"/>
+              <a:rPr lang="en-US"/>
               <a:t>Fourth level</a:t>
             </a:r>
           </a:p>
           <a:p>
             <a:pPr lvl="4"/>
             <a:r>
-              <a:rPr lang="en-US" smtClean="0"/>
+              <a:rPr lang="en-US"/>
               <a:t>Fifth level</a:t>
             </a:r>
-            <a:endParaRPr lang="en-US"/>
           </a:p>
         </p:txBody>
       </p:sp>
@@ -812,7 +820,7 @@
             <a:fld id="{1D8BD707-D9CF-40AE-B4C6-C98DA3205C09}" type="datetimeFigureOut">
               <a:rPr lang="en-US" smtClean="0"/>
               <a:pPr/>
-              <a:t>8/1/2011</a:t>
+              <a:t>12/15/2025</a:t>
             </a:fld>
             <a:endParaRPr lang="en-US"/>
           </a:p>
@@ -855,7 +863,7 @@
             <a:fld id="{B6F15528-21DE-4FAA-801E-634DDDAF4B2B}" type="slidenum">
               <a:rPr lang="en-US" smtClean="0"/>
               <a:pPr/>
-              <a:t>‹#›</a:t>
+              <a:t>‹Nº›</a:t>
             </a:fld>
             <a:endParaRPr lang="en-US"/>
           </a:p>
@@ -911,10 +919,9 @@
           </a:lstStyle>
           <a:p>
             <a:r>
-              <a:rPr lang="en-US" smtClean="0"/>
+              <a:rPr lang="en-US"/>
               <a:t>Click to edit Master title style</a:t>
             </a:r>
-            <a:endParaRPr lang="en-US"/>
           </a:p>
         </p:txBody>
       </p:sp>
@@ -1031,7 +1038,7 @@
           <a:p>
             <a:pPr lvl="0"/>
             <a:r>
-              <a:rPr lang="en-US" smtClean="0"/>
+              <a:rPr lang="en-US"/>
               <a:t>Click to edit Master text styles</a:t>
             </a:r>
           </a:p>
@@ -1055,7 +1062,7 @@
             <a:fld id="{1D8BD707-D9CF-40AE-B4C6-C98DA3205C09}" type="datetimeFigureOut">
               <a:rPr lang="en-US" smtClean="0"/>
               <a:pPr/>
-              <a:t>8/1/2011</a:t>
+              <a:t>12/15/2025</a:t>
             </a:fld>
             <a:endParaRPr lang="en-US"/>
           </a:p>
@@ -1098,7 +1105,7 @@
             <a:fld id="{B6F15528-21DE-4FAA-801E-634DDDAF4B2B}" type="slidenum">
               <a:rPr lang="en-US" smtClean="0"/>
               <a:pPr/>
-              <a:t>‹#›</a:t>
+              <a:t>‹Nº›</a:t>
             </a:fld>
             <a:endParaRPr lang="en-US"/>
           </a:p>
@@ -1145,10 +1152,9 @@
           <a:lstStyle/>
           <a:p>
             <a:r>
-              <a:rPr lang="en-US" smtClean="0"/>
+              <a:rPr lang="en-US"/>
               <a:t>Click to edit Master title style</a:t>
             </a:r>
-            <a:endParaRPr lang="en-US"/>
           </a:p>
         </p:txBody>
       </p:sp>
@@ -1202,38 +1208,37 @@
           <a:p>
             <a:pPr lvl="0"/>
             <a:r>
-              <a:rPr lang="en-US" smtClean="0"/>
+              <a:rPr lang="en-US"/>
               <a:t>Click to edit Master text styles</a:t>
             </a:r>
           </a:p>
           <a:p>
             <a:pPr lvl="1"/>
             <a:r>
-              <a:rPr lang="en-US" smtClean="0"/>
+              <a:rPr lang="en-US"/>
               <a:t>Second level</a:t>
             </a:r>
           </a:p>
           <a:p>
             <a:pPr lvl="2"/>
             <a:r>
-              <a:rPr lang="en-US" smtClean="0"/>
+              <a:rPr lang="en-US"/>
               <a:t>Third level</a:t>
             </a:r>
           </a:p>
           <a:p>
             <a:pPr lvl="3"/>
             <a:r>
-              <a:rPr lang="en-US" smtClean="0"/>
+              <a:rPr lang="en-US"/>
               <a:t>Fourth level</a:t>
             </a:r>
           </a:p>
           <a:p>
             <a:pPr lvl="4"/>
             <a:r>
-              <a:rPr lang="en-US" smtClean="0"/>
+              <a:rPr lang="en-US"/>
               <a:t>Fifth level</a:t>
             </a:r>
-            <a:endParaRPr lang="en-US"/>
           </a:p>
         </p:txBody>
       </p:sp>
@@ -1287,38 +1292,37 @@
           <a:p>
             <a:pPr lvl="0"/>
             <a:r>
-              <a:rPr lang="en-US" smtClean="0"/>
+              <a:rPr lang="en-US"/>
               <a:t>Click to edit Master text styles</a:t>
             </a:r>
           </a:p>
           <a:p>
             <a:pPr lvl="1"/>
             <a:r>
-              <a:rPr lang="en-US" smtClean="0"/>
+              <a:rPr lang="en-US"/>
               <a:t>Second level</a:t>
             </a:r>
           </a:p>
           <a:p>
             <a:pPr lvl="2"/>
             <a:r>
-              <a:rPr lang="en-US" smtClean="0"/>
+              <a:rPr lang="en-US"/>
               <a:t>Third level</a:t>
             </a:r>
           </a:p>
           <a:p>
             <a:pPr lvl="3"/>
             <a:r>
-              <a:rPr lang="en-US" smtClean="0"/>
+              <a:rPr lang="en-US"/>
               <a:t>Fourth level</a:t>
             </a:r>
           </a:p>
           <a:p>
             <a:pPr lvl="4"/>
             <a:r>
-              <a:rPr lang="en-US" smtClean="0"/>
+              <a:rPr lang="en-US"/>
               <a:t>Fifth level</a:t>
             </a:r>
-            <a:endParaRPr lang="en-US"/>
           </a:p>
         </p:txBody>
       </p:sp>
@@ -1340,7 +1344,7 @@
             <a:fld id="{1D8BD707-D9CF-40AE-B4C6-C98DA3205C09}" type="datetimeFigureOut">
               <a:rPr lang="en-US" smtClean="0"/>
               <a:pPr/>
-              <a:t>8/1/2011</a:t>
+              <a:t>12/15/2025</a:t>
             </a:fld>
             <a:endParaRPr lang="en-US"/>
           </a:p>
@@ -1383,7 +1387,7 @@
             <a:fld id="{B6F15528-21DE-4FAA-801E-634DDDAF4B2B}" type="slidenum">
               <a:rPr lang="en-US" smtClean="0"/>
               <a:pPr/>
-              <a:t>‹#›</a:t>
+              <a:t>‹Nº›</a:t>
             </a:fld>
             <a:endParaRPr lang="en-US"/>
           </a:p>
@@ -1434,10 +1438,9 @@
           </a:lstStyle>
           <a:p>
             <a:r>
-              <a:rPr lang="en-US" smtClean="0"/>
+              <a:rPr lang="en-US"/>
               <a:t>Click to edit Master title style</a:t>
             </a:r>
-            <a:endParaRPr lang="en-US"/>
           </a:p>
         </p:txBody>
       </p:sp>
@@ -1500,7 +1503,7 @@
           <a:p>
             <a:pPr lvl="0"/>
             <a:r>
-              <a:rPr lang="en-US" smtClean="0"/>
+              <a:rPr lang="en-US"/>
               <a:t>Click to edit Master text styles</a:t>
             </a:r>
           </a:p>
@@ -1556,38 +1559,37 @@
           <a:p>
             <a:pPr lvl="0"/>
             <a:r>
-              <a:rPr lang="en-US" smtClean="0"/>
+              <a:rPr lang="en-US"/>
               <a:t>Click to edit Master text styles</a:t>
             </a:r>
           </a:p>
           <a:p>
             <a:pPr lvl="1"/>
             <a:r>
-              <a:rPr lang="en-US" smtClean="0"/>
+              <a:rPr lang="en-US"/>
               <a:t>Second level</a:t>
             </a:r>
           </a:p>
           <a:p>
             <a:pPr lvl="2"/>
             <a:r>
-              <a:rPr lang="en-US" smtClean="0"/>
+              <a:rPr lang="en-US"/>
               <a:t>Third level</a:t>
             </a:r>
           </a:p>
           <a:p>
             <a:pPr lvl="3"/>
             <a:r>
-              <a:rPr lang="en-US" smtClean="0"/>
+              <a:rPr lang="en-US"/>
               <a:t>Fourth level</a:t>
             </a:r>
           </a:p>
           <a:p>
             <a:pPr lvl="4"/>
             <a:r>
-              <a:rPr lang="en-US" smtClean="0"/>
+              <a:rPr lang="en-US"/>
               <a:t>Fifth level</a:t>
             </a:r>
-            <a:endParaRPr lang="en-US"/>
           </a:p>
         </p:txBody>
       </p:sp>
@@ -1650,7 +1652,7 @@
           <a:p>
             <a:pPr lvl="0"/>
             <a:r>
-              <a:rPr lang="en-US" smtClean="0"/>
+              <a:rPr lang="en-US"/>
               <a:t>Click to edit Master text styles</a:t>
             </a:r>
           </a:p>
@@ -1706,38 +1708,37 @@
           <a:p>
             <a:pPr lvl="0"/>
             <a:r>
-              <a:rPr lang="en-US" smtClean="0"/>
+              <a:rPr lang="en-US"/>
               <a:t>Click to edit Master text styles</a:t>
             </a:r>
           </a:p>
           <a:p>
             <a:pPr lvl="1"/>
             <a:r>
-              <a:rPr lang="en-US" smtClean="0"/>
+              <a:rPr lang="en-US"/>
               <a:t>Second level</a:t>
             </a:r>
           </a:p>
           <a:p>
             <a:pPr lvl="2"/>
             <a:r>
-              <a:rPr lang="en-US" smtClean="0"/>
+              <a:rPr lang="en-US"/>
               <a:t>Third level</a:t>
             </a:r>
           </a:p>
           <a:p>
             <a:pPr lvl="3"/>
             <a:r>
-              <a:rPr lang="en-US" smtClean="0"/>
+              <a:rPr lang="en-US"/>
               <a:t>Fourth level</a:t>
             </a:r>
           </a:p>
           <a:p>
             <a:pPr lvl="4"/>
             <a:r>
-              <a:rPr lang="en-US" smtClean="0"/>
+              <a:rPr lang="en-US"/>
               <a:t>Fifth level</a:t>
             </a:r>
-            <a:endParaRPr lang="en-US"/>
           </a:p>
         </p:txBody>
       </p:sp>
@@ -1759,7 +1760,7 @@
             <a:fld id="{1D8BD707-D9CF-40AE-B4C6-C98DA3205C09}" type="datetimeFigureOut">
               <a:rPr lang="en-US" smtClean="0"/>
               <a:pPr/>
-              <a:t>8/1/2011</a:t>
+              <a:t>12/15/2025</a:t>
             </a:fld>
             <a:endParaRPr lang="en-US"/>
           </a:p>
@@ -1802,7 +1803,7 @@
             <a:fld id="{B6F15528-21DE-4FAA-801E-634DDDAF4B2B}" type="slidenum">
               <a:rPr lang="en-US" smtClean="0"/>
               <a:pPr/>
-              <a:t>‹#›</a:t>
+              <a:t>‹Nº›</a:t>
             </a:fld>
             <a:endParaRPr lang="en-US"/>
           </a:p>
@@ -1849,10 +1850,9 @@
           <a:lstStyle/>
           <a:p>
             <a:r>
-              <a:rPr lang="en-US" smtClean="0"/>
+              <a:rPr lang="en-US"/>
               <a:t>Click to edit Master title style</a:t>
             </a:r>
-            <a:endParaRPr lang="en-US"/>
           </a:p>
         </p:txBody>
       </p:sp>
@@ -1874,7 +1874,7 @@
             <a:fld id="{1D8BD707-D9CF-40AE-B4C6-C98DA3205C09}" type="datetimeFigureOut">
               <a:rPr lang="en-US" smtClean="0"/>
               <a:pPr/>
-              <a:t>8/1/2011</a:t>
+              <a:t>12/15/2025</a:t>
             </a:fld>
             <a:endParaRPr lang="en-US"/>
           </a:p>
@@ -1917,7 +1917,7 @@
             <a:fld id="{B6F15528-21DE-4FAA-801E-634DDDAF4B2B}" type="slidenum">
               <a:rPr lang="en-US" smtClean="0"/>
               <a:pPr/>
-              <a:t>‹#›</a:t>
+              <a:t>‹Nº›</a:t>
             </a:fld>
             <a:endParaRPr lang="en-US"/>
           </a:p>
@@ -1966,7 +1966,7 @@
             <a:fld id="{1D8BD707-D9CF-40AE-B4C6-C98DA3205C09}" type="datetimeFigureOut">
               <a:rPr lang="en-US" smtClean="0"/>
               <a:pPr/>
-              <a:t>8/1/2011</a:t>
+              <a:t>12/15/2025</a:t>
             </a:fld>
             <a:endParaRPr lang="en-US"/>
           </a:p>
@@ -2009,7 +2009,7 @@
             <a:fld id="{B6F15528-21DE-4FAA-801E-634DDDAF4B2B}" type="slidenum">
               <a:rPr lang="en-US" smtClean="0"/>
               <a:pPr/>
-              <a:t>‹#›</a:t>
+              <a:t>‹Nº›</a:t>
             </a:fld>
             <a:endParaRPr lang="en-US"/>
           </a:p>
@@ -2065,10 +2065,9 @@
           </a:lstStyle>
           <a:p>
             <a:r>
-              <a:rPr lang="en-US" smtClean="0"/>
+              <a:rPr lang="en-US"/>
               <a:t>Click to edit Master title style</a:t>
             </a:r>
-            <a:endParaRPr lang="en-US"/>
           </a:p>
         </p:txBody>
       </p:sp>
@@ -2122,38 +2121,37 @@
           <a:p>
             <a:pPr lvl="0"/>
             <a:r>
-              <a:rPr lang="en-US" smtClean="0"/>
+              <a:rPr lang="en-US"/>
               <a:t>Click to edit Master text styles</a:t>
             </a:r>
           </a:p>
           <a:p>
             <a:pPr lvl="1"/>
             <a:r>
-              <a:rPr lang="en-US" smtClean="0"/>
+              <a:rPr lang="en-US"/>
               <a:t>Second level</a:t>
             </a:r>
           </a:p>
           <a:p>
             <a:pPr lvl="2"/>
             <a:r>
-              <a:rPr lang="en-US" smtClean="0"/>
+              <a:rPr lang="en-US"/>
               <a:t>Third level</a:t>
             </a:r>
           </a:p>
           <a:p>
             <a:pPr lvl="3"/>
             <a:r>
-              <a:rPr lang="en-US" smtClean="0"/>
+              <a:rPr lang="en-US"/>
               <a:t>Fourth level</a:t>
             </a:r>
           </a:p>
           <a:p>
             <a:pPr lvl="4"/>
             <a:r>
-              <a:rPr lang="en-US" smtClean="0"/>
+              <a:rPr lang="en-US"/>
               <a:t>Fifth level</a:t>
             </a:r>
-            <a:endParaRPr lang="en-US"/>
           </a:p>
         </p:txBody>
       </p:sp>
@@ -2216,7 +2214,7 @@
           <a:p>
             <a:pPr lvl="0"/>
             <a:r>
-              <a:rPr lang="en-US" smtClean="0"/>
+              <a:rPr lang="en-US"/>
               <a:t>Click to edit Master text styles</a:t>
             </a:r>
           </a:p>
@@ -2240,7 +2238,7 @@
             <a:fld id="{1D8BD707-D9CF-40AE-B4C6-C98DA3205C09}" type="datetimeFigureOut">
               <a:rPr lang="en-US" smtClean="0"/>
               <a:pPr/>
-              <a:t>8/1/2011</a:t>
+              <a:t>12/15/2025</a:t>
             </a:fld>
             <a:endParaRPr lang="en-US"/>
           </a:p>
@@ -2283,7 +2281,7 @@
             <a:fld id="{B6F15528-21DE-4FAA-801E-634DDDAF4B2B}" type="slidenum">
               <a:rPr lang="en-US" smtClean="0"/>
               <a:pPr/>
-              <a:t>‹#›</a:t>
+              <a:t>‹Nº›</a:t>
             </a:fld>
             <a:endParaRPr lang="en-US"/>
           </a:p>
@@ -2339,10 +2337,9 @@
           </a:lstStyle>
           <a:p>
             <a:r>
-              <a:rPr lang="en-US" smtClean="0"/>
+              <a:rPr lang="en-US"/>
               <a:t>Click to edit Master title style</a:t>
             </a:r>
-            <a:endParaRPr lang="en-US"/>
           </a:p>
         </p:txBody>
       </p:sp>
@@ -2466,7 +2463,7 @@
           <a:p>
             <a:pPr lvl="0"/>
             <a:r>
-              <a:rPr lang="en-US" smtClean="0"/>
+              <a:rPr lang="en-US"/>
               <a:t>Click to edit Master text styles</a:t>
             </a:r>
           </a:p>
@@ -2490,7 +2487,7 @@
             <a:fld id="{1D8BD707-D9CF-40AE-B4C6-C98DA3205C09}" type="datetimeFigureOut">
               <a:rPr lang="en-US" smtClean="0"/>
               <a:pPr/>
-              <a:t>8/1/2011</a:t>
+              <a:t>12/15/2025</a:t>
             </a:fld>
             <a:endParaRPr lang="en-US"/>
           </a:p>
@@ -2533,7 +2530,7 @@
             <a:fld id="{B6F15528-21DE-4FAA-801E-634DDDAF4B2B}" type="slidenum">
               <a:rPr lang="en-US" smtClean="0"/>
               <a:pPr/>
-              <a:t>‹#›</a:t>
+              <a:t>‹Nº›</a:t>
             </a:fld>
             <a:endParaRPr lang="en-US"/>
           </a:p>
@@ -2595,10 +2592,9 @@
           <a:lstStyle/>
           <a:p>
             <a:r>
-              <a:rPr lang="en-US" smtClean="0"/>
+              <a:rPr lang="en-US"/>
               <a:t>Click to edit Master title style</a:t>
             </a:r>
-            <a:endParaRPr lang="en-US"/>
           </a:p>
         </p:txBody>
       </p:sp>
@@ -2629,38 +2625,37 @@
           <a:p>
             <a:pPr lvl="0"/>
             <a:r>
-              <a:rPr lang="en-US" smtClean="0"/>
+              <a:rPr lang="en-US"/>
               <a:t>Click to edit Master text styles</a:t>
             </a:r>
           </a:p>
           <a:p>
             <a:pPr lvl="1"/>
             <a:r>
-              <a:rPr lang="en-US" smtClean="0"/>
+              <a:rPr lang="en-US"/>
               <a:t>Second level</a:t>
             </a:r>
           </a:p>
           <a:p>
             <a:pPr lvl="2"/>
             <a:r>
-              <a:rPr lang="en-US" smtClean="0"/>
+              <a:rPr lang="en-US"/>
               <a:t>Third level</a:t>
             </a:r>
           </a:p>
           <a:p>
             <a:pPr lvl="3"/>
             <a:r>
-              <a:rPr lang="en-US" smtClean="0"/>
+              <a:rPr lang="en-US"/>
               <a:t>Fourth level</a:t>
             </a:r>
           </a:p>
           <a:p>
             <a:pPr lvl="4"/>
             <a:r>
-              <a:rPr lang="en-US" smtClean="0"/>
+              <a:rPr lang="en-US"/>
               <a:t>Fifth level</a:t>
             </a:r>
-            <a:endParaRPr lang="en-US"/>
           </a:p>
         </p:txBody>
       </p:sp>
@@ -2700,7 +2695,7 @@
             <a:fld id="{1D8BD707-D9CF-40AE-B4C6-C98DA3205C09}" type="datetimeFigureOut">
               <a:rPr lang="en-US" smtClean="0"/>
               <a:pPr/>
-              <a:t>8/1/2011</a:t>
+              <a:t>12/15/2025</a:t>
             </a:fld>
             <a:endParaRPr lang="en-US"/>
           </a:p>
@@ -2779,7 +2774,7 @@
             <a:fld id="{B6F15528-21DE-4FAA-801E-634DDDAF4B2B}" type="slidenum">
               <a:rPr lang="en-US" smtClean="0"/>
               <a:pPr/>
-              <a:t>‹#›</a:t>
+              <a:t>‹Nº›</a:t>
             </a:fld>
             <a:endParaRPr lang="en-US"/>
           </a:p>
@@ -3055,13 +3050,14 @@
 </file>
 
 <file path=ppt/slides/slide1.xml><?xml version="1.0" encoding="utf-8"?>
-<p:sld xmlns:p="http://schemas.openxmlformats.org/presentationml/2006/main" xmlns:a="http://schemas.openxmlformats.org/drawingml/2006/main" xmlns:r="http://schemas.openxmlformats.org/officeDocument/2006/relationships">
+<p:sld xmlns:a="http://schemas.openxmlformats.org/drawingml/2006/main" xmlns:r="http://schemas.openxmlformats.org/officeDocument/2006/relationships" xmlns:p="http://schemas.openxmlformats.org/presentationml/2006/main">
   <p:cSld>
     <p:bg>
       <p:bgPr>
         <a:solidFill>
           <a:srgbClr val="20232A"/>
         </a:solidFill>
+        <a:effectLst/>
       </p:bgPr>
     </p:bg>
     <p:spTree>
@@ -3080,7 +3076,7 @@
       </p:grpSpPr>
       <p:sp>
         <p:nvSpPr>
-          <p:cNvPr name="AutoShape 2" id="2"/>
+          <p:cNvPr id="2" name="AutoShape 2"/>
           <p:cNvSpPr/>
           <p:nvPr/>
         </p:nvSpPr>
@@ -3092,24 +3088,31 @@
           <a:prstGeom prst="line">
             <a:avLst/>
           </a:prstGeom>
-          <a:ln cap="flat" w="95250">
+          <a:ln w="95250" cap="flat">
             <a:solidFill>
               <a:srgbClr val="2D2D35"/>
             </a:solidFill>
             <a:prstDash val="solid"/>
-            <a:headEnd type="none" len="sm" w="sm"/>
-            <a:tailEnd type="none" len="sm" w="sm"/>
+            <a:headEnd type="none" w="sm" len="sm"/>
+            <a:tailEnd type="none" w="sm" len="sm"/>
           </a:ln>
         </p:spPr>
+        <p:txBody>
+          <a:bodyPr/>
+          <a:lstStyle/>
+          <a:p>
+            <a:endParaRPr lang="en-US"/>
+          </a:p>
+        </p:txBody>
       </p:sp>
       <p:grpSp>
         <p:nvGrpSpPr>
-          <p:cNvPr name="Group 3" id="3"/>
+          <p:cNvPr id="3" name="Group 3"/>
           <p:cNvGrpSpPr/>
           <p:nvPr/>
         </p:nvGrpSpPr>
         <p:grpSpPr>
-          <a:xfrm rot="0">
+          <a:xfrm>
             <a:off x="14762002" y="-102870"/>
             <a:ext cx="4230823" cy="10389870"/>
             <a:chOff x="0" y="0"/>
@@ -3118,12 +3121,12 @@
         </p:grpSpPr>
         <p:sp>
           <p:nvSpPr>
-            <p:cNvPr name="Freeform 4" id="4"/>
+            <p:cNvPr id="4" name="Freeform 4"/>
             <p:cNvSpPr/>
             <p:nvPr/>
           </p:nvSpPr>
           <p:spPr>
-            <a:xfrm flipH="false" flipV="false" rot="0">
+            <a:xfrm>
               <a:off x="0" y="0"/>
               <a:ext cx="1543416" cy="3790253"/>
             </a:xfrm>
@@ -3132,9 +3135,9 @@
               <a:gdLst/>
               <a:ahLst/>
               <a:cxnLst/>
-              <a:rect r="r" b="b" t="t" l="l"/>
+              <a:rect l="l" t="t" r="r" b="b"/>
               <a:pathLst>
-                <a:path h="3790253" w="1543416">
+                <a:path w="1543416" h="3790253">
                   <a:moveTo>
                     <a:pt x="0" y="0"/>
                   </a:moveTo>
@@ -3155,40 +3158,54 @@
               <a:srgbClr val="2D2D35"/>
             </a:solidFill>
           </p:spPr>
+          <p:txBody>
+            <a:bodyPr/>
+            <a:lstStyle/>
+            <a:p>
+              <a:endParaRPr lang="en-US"/>
+            </a:p>
+          </p:txBody>
         </p:sp>
       </p:grpSp>
       <p:sp>
         <p:nvSpPr>
-          <p:cNvPr name="AutoShape 5" id="5"/>
+          <p:cNvPr id="5" name="AutoShape 5"/>
           <p:cNvSpPr/>
           <p:nvPr/>
         </p:nvSpPr>
         <p:spPr>
-          <a:xfrm rot="0">
+          <a:xfrm>
             <a:off x="14666595" y="9210675"/>
             <a:ext cx="1539000" cy="0"/>
           </a:xfrm>
           <a:prstGeom prst="line">
             <a:avLst/>
           </a:prstGeom>
-          <a:ln cap="flat" w="47625">
+          <a:ln w="47625" cap="flat">
             <a:solidFill>
               <a:srgbClr val="FFFFFF"/>
             </a:solidFill>
             <a:prstDash val="solid"/>
-            <a:headEnd type="diamond" len="lg" w="lg"/>
-            <a:tailEnd type="arrow" len="sm" w="med"/>
+            <a:headEnd type="diamond" w="lg" len="lg"/>
+            <a:tailEnd type="arrow" w="med" len="sm"/>
           </a:ln>
         </p:spPr>
-      </p:sp>
-      <p:sp>
-        <p:nvSpPr>
-          <p:cNvPr name="Freeform 6" id="6"/>
+        <p:txBody>
+          <a:bodyPr/>
+          <a:lstStyle/>
+          <a:p>
+            <a:endParaRPr lang="en-US"/>
+          </a:p>
+        </p:txBody>
+      </p:sp>
+      <p:sp>
+        <p:nvSpPr>
+          <p:cNvPr id="6" name="Freeform 6"/>
           <p:cNvSpPr/>
           <p:nvPr/>
         </p:nvSpPr>
         <p:spPr>
-          <a:xfrm flipH="false" flipV="false" rot="0">
+          <a:xfrm>
             <a:off x="13255946" y="5287152"/>
             <a:ext cx="4440688" cy="3737579"/>
           </a:xfrm>
@@ -3197,9 +3214,9 @@
             <a:gdLst/>
             <a:ahLst/>
             <a:cxnLst/>
-            <a:rect r="r" b="b" t="t" l="l"/>
+            <a:rect l="l" t="t" r="r" b="b"/>
             <a:pathLst>
-              <a:path h="3737579" w="4440688">
+              <a:path w="4440688" h="3737579">
                 <a:moveTo>
                   <a:pt x="0" y="0"/>
                 </a:moveTo>
@@ -3222,19 +3239,26 @@
           <a:blipFill>
             <a:blip r:embed="rId2"/>
             <a:stretch>
-              <a:fillRect l="0" t="0" r="0" b="0"/>
+              <a:fillRect/>
             </a:stretch>
           </a:blipFill>
         </p:spPr>
-      </p:sp>
-      <p:sp>
-        <p:nvSpPr>
-          <p:cNvPr name="TextBox 7" id="7"/>
-          <p:cNvSpPr txBox="true"/>
+        <p:txBody>
+          <a:bodyPr/>
+          <a:lstStyle/>
+          <a:p>
+            <a:endParaRPr lang="en-US"/>
+          </a:p>
+        </p:txBody>
+      </p:sp>
+      <p:sp>
+        <p:nvSpPr>
+          <p:cNvPr id="7" name="TextBox 7"/>
+          <p:cNvSpPr txBox="1"/>
           <p:nvPr/>
         </p:nvSpPr>
         <p:spPr>
-          <a:xfrm rot="0">
+          <a:xfrm>
             <a:off x="2537186" y="2676000"/>
             <a:ext cx="11224086" cy="2259110"/>
           </a:xfrm>
@@ -3243,7 +3267,7 @@
           </a:prstGeom>
         </p:spPr>
         <p:txBody>
-          <a:bodyPr anchor="t" rtlCol="false" tIns="0" lIns="0" bIns="0" rIns="0">
+          <a:bodyPr lIns="0" tIns="0" rIns="0" bIns="0" rtlCol="0" anchor="t">
             <a:spAutoFit/>
           </a:bodyPr>
           <a:lstStyle/>
@@ -3270,12 +3294,12 @@
       </p:sp>
       <p:sp>
         <p:nvSpPr>
-          <p:cNvPr name="TextBox 8" id="8"/>
-          <p:cNvSpPr txBox="true"/>
+          <p:cNvPr id="8" name="TextBox 8"/>
+          <p:cNvSpPr txBox="1"/>
           <p:nvPr/>
         </p:nvSpPr>
         <p:spPr>
-          <a:xfrm rot="0">
+          <a:xfrm>
             <a:off x="2415791" y="7091193"/>
             <a:ext cx="2471972" cy="1607392"/>
           </a:xfrm>
@@ -3284,7 +3308,7 @@
           </a:prstGeom>
         </p:spPr>
         <p:txBody>
-          <a:bodyPr anchor="t" rtlCol="false" tIns="0" lIns="0" bIns="0" rIns="0">
+          <a:bodyPr lIns="0" tIns="0" rIns="0" bIns="0" rtlCol="0" anchor="t">
             <a:spAutoFit/>
           </a:bodyPr>
           <a:lstStyle/>
@@ -3311,12 +3335,12 @@
       </p:sp>
       <p:sp>
         <p:nvSpPr>
-          <p:cNvPr name="TextBox 9" id="9"/>
-          <p:cNvSpPr txBox="true"/>
+          <p:cNvPr id="9" name="TextBox 9"/>
+          <p:cNvSpPr txBox="1"/>
           <p:nvPr/>
         </p:nvSpPr>
         <p:spPr>
-          <a:xfrm rot="0">
+          <a:xfrm>
             <a:off x="2278912" y="5828968"/>
             <a:ext cx="10747189" cy="505830"/>
           </a:xfrm>
@@ -3325,7 +3349,7 @@
           </a:prstGeom>
         </p:spPr>
         <p:txBody>
-          <a:bodyPr anchor="t" rtlCol="false" tIns="0" lIns="0" bIns="0" rIns="0">
+          <a:bodyPr lIns="0" tIns="0" rIns="0" bIns="0" rtlCol="0" anchor="t">
             <a:spAutoFit/>
           </a:bodyPr>
           <a:lstStyle/>
@@ -3352,12 +3376,12 @@
       </p:sp>
       <p:sp>
         <p:nvSpPr>
-          <p:cNvPr name="TextBox 10" id="10"/>
-          <p:cNvSpPr txBox="true"/>
+          <p:cNvPr id="10" name="TextBox 10"/>
+          <p:cNvSpPr txBox="1"/>
           <p:nvPr/>
         </p:nvSpPr>
         <p:spPr>
-          <a:xfrm rot="0">
+          <a:xfrm>
             <a:off x="2194891" y="1687047"/>
             <a:ext cx="11259224" cy="474154"/>
           </a:xfrm>
@@ -3366,7 +3390,7 @@
           </a:prstGeom>
         </p:spPr>
         <p:txBody>
-          <a:bodyPr anchor="t" rtlCol="false" tIns="0" lIns="0" bIns="0" rIns="0">
+          <a:bodyPr lIns="0" tIns="0" rIns="0" bIns="0" rtlCol="0" anchor="t">
             <a:spAutoFit/>
           </a:bodyPr>
           <a:lstStyle/>
@@ -3400,13 +3424,14 @@
 </file>
 
 <file path=ppt/slides/slide2.xml><?xml version="1.0" encoding="utf-8"?>
-<p:sld xmlns:p="http://schemas.openxmlformats.org/presentationml/2006/main" xmlns:a="http://schemas.openxmlformats.org/drawingml/2006/main" xmlns:r="http://schemas.openxmlformats.org/officeDocument/2006/relationships">
+<p:sld xmlns:a="http://schemas.openxmlformats.org/drawingml/2006/main" xmlns:r="http://schemas.openxmlformats.org/officeDocument/2006/relationships" xmlns:p="http://schemas.openxmlformats.org/presentationml/2006/main">
   <p:cSld>
     <p:bg>
       <p:bgPr>
         <a:solidFill>
           <a:srgbClr val="20232A"/>
         </a:solidFill>
+        <a:effectLst/>
       </p:bgPr>
     </p:bg>
     <p:spTree>
@@ -3425,12 +3450,12 @@
       </p:grpSpPr>
       <p:grpSp>
         <p:nvGrpSpPr>
-          <p:cNvPr name="Group 2" id="2"/>
+          <p:cNvPr id="2" name="Group 2"/>
           <p:cNvGrpSpPr/>
           <p:nvPr/>
         </p:nvGrpSpPr>
         <p:grpSpPr>
-          <a:xfrm rot="0">
+          <a:xfrm>
             <a:off x="-170578" y="-102870"/>
             <a:ext cx="9985477" cy="10389870"/>
             <a:chOff x="0" y="0"/>
@@ -3439,12 +3464,12 @@
         </p:grpSpPr>
         <p:sp>
           <p:nvSpPr>
-            <p:cNvPr name="Freeform 3" id="3"/>
+            <p:cNvPr id="3" name="Freeform 3"/>
             <p:cNvSpPr/>
             <p:nvPr/>
           </p:nvSpPr>
           <p:spPr>
-            <a:xfrm flipH="false" flipV="false" rot="0">
+            <a:xfrm>
               <a:off x="0" y="0"/>
               <a:ext cx="3642729" cy="3790253"/>
             </a:xfrm>
@@ -3453,9 +3478,9 @@
               <a:gdLst/>
               <a:ahLst/>
               <a:cxnLst/>
-              <a:rect r="r" b="b" t="t" l="l"/>
+              <a:rect l="l" t="t" r="r" b="b"/>
               <a:pathLst>
-                <a:path h="3790253" w="3642729">
+                <a:path w="3642729" h="3790253">
                   <a:moveTo>
                     <a:pt x="0" y="0"/>
                   </a:moveTo>
@@ -3476,11 +3501,18 @@
               <a:srgbClr val="2D2D35"/>
             </a:solidFill>
           </p:spPr>
+          <p:txBody>
+            <a:bodyPr/>
+            <a:lstStyle/>
+            <a:p>
+              <a:endParaRPr lang="en-US"/>
+            </a:p>
+          </p:txBody>
         </p:sp>
       </p:grpSp>
       <p:sp>
         <p:nvSpPr>
-          <p:cNvPr name="AutoShape 4" id="4"/>
+          <p:cNvPr id="4" name="AutoShape 4"/>
           <p:cNvSpPr/>
           <p:nvPr/>
         </p:nvSpPr>
@@ -3492,24 +3524,31 @@
           <a:prstGeom prst="line">
             <a:avLst/>
           </a:prstGeom>
-          <a:ln cap="flat" w="95250">
+          <a:ln w="95250" cap="flat">
             <a:solidFill>
               <a:srgbClr val="2D2D35"/>
             </a:solidFill>
             <a:prstDash val="solid"/>
-            <a:headEnd type="none" len="sm" w="sm"/>
-            <a:tailEnd type="none" len="sm" w="sm"/>
+            <a:headEnd type="none" w="sm" len="sm"/>
+            <a:tailEnd type="none" w="sm" len="sm"/>
           </a:ln>
         </p:spPr>
-      </p:sp>
-      <p:sp>
-        <p:nvSpPr>
-          <p:cNvPr name="Freeform 5" id="5"/>
+        <p:txBody>
+          <a:bodyPr/>
+          <a:lstStyle/>
+          <a:p>
+            <a:endParaRPr lang="en-US"/>
+          </a:p>
+        </p:txBody>
+      </p:sp>
+      <p:sp>
+        <p:nvSpPr>
+          <p:cNvPr id="5" name="Freeform 5"/>
           <p:cNvSpPr/>
           <p:nvPr/>
         </p:nvSpPr>
         <p:spPr>
-          <a:xfrm flipH="false" flipV="false" rot="0">
+          <a:xfrm>
             <a:off x="11565640" y="1812435"/>
             <a:ext cx="5815860" cy="6024197"/>
           </a:xfrm>
@@ -3518,9 +3557,9 @@
             <a:gdLst/>
             <a:ahLst/>
             <a:cxnLst/>
-            <a:rect r="r" b="b" t="t" l="l"/>
+            <a:rect l="l" t="t" r="r" b="b"/>
             <a:pathLst>
-              <a:path h="6024197" w="5815860">
+              <a:path w="5815860" h="6024197">
                 <a:moveTo>
                   <a:pt x="0" y="0"/>
                 </a:moveTo>
@@ -3543,19 +3582,26 @@
           <a:blipFill>
             <a:blip r:embed="rId2"/>
             <a:stretch>
-              <a:fillRect l="0" t="0" r="0" b="0"/>
+              <a:fillRect/>
             </a:stretch>
           </a:blipFill>
         </p:spPr>
-      </p:sp>
-      <p:sp>
-        <p:nvSpPr>
-          <p:cNvPr name="TextBox 6" id="6"/>
-          <p:cNvSpPr txBox="true"/>
+        <p:txBody>
+          <a:bodyPr/>
+          <a:lstStyle/>
+          <a:p>
+            <a:endParaRPr lang="en-US"/>
+          </a:p>
+        </p:txBody>
+      </p:sp>
+      <p:sp>
+        <p:nvSpPr>
+          <p:cNvPr id="6" name="TextBox 6"/>
+          <p:cNvSpPr txBox="1"/>
           <p:nvPr/>
         </p:nvSpPr>
         <p:spPr>
-          <a:xfrm rot="0">
+          <a:xfrm>
             <a:off x="1028700" y="1047750"/>
             <a:ext cx="7031406" cy="582930"/>
           </a:xfrm>
@@ -3564,7 +3610,7 @@
           </a:prstGeom>
         </p:spPr>
         <p:txBody>
-          <a:bodyPr anchor="t" rtlCol="false" tIns="0" lIns="0" bIns="0" rIns="0">
+          <a:bodyPr lIns="0" tIns="0" rIns="0" bIns="0" rtlCol="0" anchor="t">
             <a:spAutoFit/>
           </a:bodyPr>
           <a:lstStyle/>
@@ -3591,12 +3637,12 @@
       </p:sp>
       <p:sp>
         <p:nvSpPr>
-          <p:cNvPr name="TextBox 7" id="7"/>
-          <p:cNvSpPr txBox="true"/>
+          <p:cNvPr id="7" name="TextBox 7"/>
+          <p:cNvSpPr txBox="1"/>
           <p:nvPr/>
         </p:nvSpPr>
         <p:spPr>
-          <a:xfrm rot="0">
+          <a:xfrm>
             <a:off x="16557135" y="8675370"/>
             <a:ext cx="702165" cy="582930"/>
           </a:xfrm>
@@ -3605,7 +3651,7 @@
           </a:prstGeom>
         </p:spPr>
         <p:txBody>
-          <a:bodyPr anchor="t" rtlCol="false" tIns="0" lIns="0" bIns="0" rIns="0">
+          <a:bodyPr lIns="0" tIns="0" rIns="0" bIns="0" rtlCol="0" anchor="t">
             <a:spAutoFit/>
           </a:bodyPr>
           <a:lstStyle/>
@@ -3632,12 +3678,12 @@
       </p:sp>
       <p:sp>
         <p:nvSpPr>
-          <p:cNvPr name="TextBox 8" id="8"/>
-          <p:cNvSpPr txBox="true"/>
+          <p:cNvPr id="8" name="TextBox 8"/>
+          <p:cNvSpPr txBox="1"/>
           <p:nvPr/>
         </p:nvSpPr>
         <p:spPr>
-          <a:xfrm rot="0">
+          <a:xfrm>
             <a:off x="833919" y="2218436"/>
             <a:ext cx="7964076" cy="3915664"/>
           </a:xfrm>
@@ -3646,7 +3692,7 @@
           </a:prstGeom>
         </p:spPr>
         <p:txBody>
-          <a:bodyPr anchor="t" rtlCol="false" tIns="0" lIns="0" bIns="0" rIns="0">
+          <a:bodyPr lIns="0" tIns="0" rIns="0" bIns="0" rtlCol="0" anchor="t">
             <a:spAutoFit/>
           </a:bodyPr>
           <a:lstStyle/>
@@ -3680,13 +3726,14 @@
 </file>
 
 <file path=ppt/slides/slide3.xml><?xml version="1.0" encoding="utf-8"?>
-<p:sld xmlns:p="http://schemas.openxmlformats.org/presentationml/2006/main" xmlns:a="http://schemas.openxmlformats.org/drawingml/2006/main" xmlns:r="http://schemas.openxmlformats.org/officeDocument/2006/relationships">
+<p:sld xmlns:a="http://schemas.openxmlformats.org/drawingml/2006/main" xmlns:r="http://schemas.openxmlformats.org/officeDocument/2006/relationships" xmlns:p="http://schemas.openxmlformats.org/presentationml/2006/main">
   <p:cSld>
     <p:bg>
       <p:bgPr>
         <a:solidFill>
           <a:srgbClr val="20232A"/>
         </a:solidFill>
+        <a:effectLst/>
       </p:bgPr>
     </p:bg>
     <p:spTree>
@@ -3705,12 +3752,12 @@
       </p:grpSpPr>
       <p:grpSp>
         <p:nvGrpSpPr>
-          <p:cNvPr name="Group 2" id="2"/>
+          <p:cNvPr id="2" name="Group 2"/>
           <p:cNvGrpSpPr/>
           <p:nvPr/>
         </p:nvGrpSpPr>
         <p:grpSpPr>
-          <a:xfrm rot="0">
+          <a:xfrm>
             <a:off x="11802099" y="-102870"/>
             <a:ext cx="6656479" cy="10389870"/>
             <a:chOff x="0" y="0"/>
@@ -3719,12 +3766,12 @@
         </p:grpSpPr>
         <p:sp>
           <p:nvSpPr>
-            <p:cNvPr name="Freeform 3" id="3"/>
+            <p:cNvPr id="3" name="Freeform 3"/>
             <p:cNvSpPr/>
             <p:nvPr/>
           </p:nvSpPr>
           <p:spPr>
-            <a:xfrm flipH="false" flipV="false" rot="0">
+            <a:xfrm>
               <a:off x="0" y="0"/>
               <a:ext cx="2428302" cy="3790253"/>
             </a:xfrm>
@@ -3733,9 +3780,9 @@
               <a:gdLst/>
               <a:ahLst/>
               <a:cxnLst/>
-              <a:rect r="r" b="b" t="t" l="l"/>
+              <a:rect l="l" t="t" r="r" b="b"/>
               <a:pathLst>
-                <a:path h="3790253" w="2428302">
+                <a:path w="2428302" h="3790253">
                   <a:moveTo>
                     <a:pt x="0" y="0"/>
                   </a:moveTo>
@@ -3756,16 +3803,23 @@
               <a:srgbClr val="2D2D35"/>
             </a:solidFill>
           </p:spPr>
+          <p:txBody>
+            <a:bodyPr/>
+            <a:lstStyle/>
+            <a:p>
+              <a:endParaRPr lang="en-US"/>
+            </a:p>
+          </p:txBody>
         </p:sp>
       </p:grpSp>
       <p:sp>
         <p:nvSpPr>
-          <p:cNvPr name="Freeform 4" id="4"/>
+          <p:cNvPr id="4" name="Freeform 4"/>
           <p:cNvSpPr/>
           <p:nvPr/>
         </p:nvSpPr>
         <p:spPr>
-          <a:xfrm flipH="false" flipV="false" rot="0">
+          <a:xfrm>
             <a:off x="12452263" y="1180737"/>
             <a:ext cx="5086599" cy="7027254"/>
           </a:xfrm>
@@ -3774,9 +3828,9 @@
             <a:gdLst/>
             <a:ahLst/>
             <a:cxnLst/>
-            <a:rect r="r" b="b" t="t" l="l"/>
+            <a:rect l="l" t="t" r="r" b="b"/>
             <a:pathLst>
-              <a:path h="7027254" w="5086599">
+              <a:path w="5086599" h="7027254">
                 <a:moveTo>
                   <a:pt x="0" y="0"/>
                 </a:moveTo>
@@ -3799,19 +3853,26 @@
           <a:blipFill>
             <a:blip r:embed="rId2"/>
             <a:stretch>
-              <a:fillRect l="-77093" t="0" r="-30135" b="0"/>
+              <a:fillRect l="-77093" r="-30135"/>
             </a:stretch>
           </a:blipFill>
         </p:spPr>
-      </p:sp>
-      <p:sp>
-        <p:nvSpPr>
-          <p:cNvPr name="TextBox 5" id="5"/>
-          <p:cNvSpPr txBox="true"/>
+        <p:txBody>
+          <a:bodyPr/>
+          <a:lstStyle/>
+          <a:p>
+            <a:endParaRPr lang="en-US"/>
+          </a:p>
+        </p:txBody>
+      </p:sp>
+      <p:sp>
+        <p:nvSpPr>
+          <p:cNvPr id="5" name="TextBox 5"/>
+          <p:cNvSpPr txBox="1"/>
           <p:nvPr/>
         </p:nvSpPr>
         <p:spPr>
-          <a:xfrm rot="0">
+          <a:xfrm>
             <a:off x="1028700" y="746760"/>
             <a:ext cx="7031406" cy="582930"/>
           </a:xfrm>
@@ -3820,7 +3881,7 @@
           </a:prstGeom>
         </p:spPr>
         <p:txBody>
-          <a:bodyPr anchor="t" rtlCol="false" tIns="0" lIns="0" bIns="0" rIns="0">
+          <a:bodyPr lIns="0" tIns="0" rIns="0" bIns="0" rtlCol="0" anchor="t">
             <a:spAutoFit/>
           </a:bodyPr>
           <a:lstStyle/>
@@ -3847,12 +3908,12 @@
       </p:sp>
       <p:sp>
         <p:nvSpPr>
-          <p:cNvPr name="TextBox 6" id="6"/>
-          <p:cNvSpPr txBox="true"/>
+          <p:cNvPr id="6" name="TextBox 6"/>
+          <p:cNvSpPr txBox="1"/>
           <p:nvPr/>
         </p:nvSpPr>
         <p:spPr>
-          <a:xfrm rot="0">
+          <a:xfrm>
             <a:off x="511115" y="1995678"/>
             <a:ext cx="10635444" cy="6961632"/>
           </a:xfrm>
@@ -3861,12 +3922,12 @@
           </a:prstGeom>
         </p:spPr>
         <p:txBody>
-          <a:bodyPr anchor="t" rtlCol="false" tIns="0" lIns="0" bIns="0" rIns="0">
+          <a:bodyPr lIns="0" tIns="0" rIns="0" bIns="0" rtlCol="0" anchor="t">
             <a:spAutoFit/>
           </a:bodyPr>
           <a:lstStyle/>
           <a:p>
-            <a:pPr algn="l" marL="518160" indent="-259080" lvl="1">
+            <a:pPr marL="518160" lvl="1" indent="-259080" algn="l">
               <a:lnSpc>
                 <a:spcPts val="3264"/>
               </a:lnSpc>
@@ -3899,7 +3960,7 @@
             </a:r>
           </a:p>
           <a:p>
-            <a:pPr algn="l" marL="518160" indent="-259080" lvl="1">
+            <a:pPr marL="518160" lvl="1" indent="-259080" algn="l">
               <a:lnSpc>
                 <a:spcPts val="3264"/>
               </a:lnSpc>
@@ -3932,7 +3993,7 @@
             </a:r>
           </a:p>
           <a:p>
-            <a:pPr algn="l" marL="518160" indent="-259080" lvl="1">
+            <a:pPr marL="518160" lvl="1" indent="-259080" algn="l">
               <a:lnSpc>
                 <a:spcPts val="3264"/>
               </a:lnSpc>
@@ -3965,7 +4026,7 @@
             </a:r>
           </a:p>
           <a:p>
-            <a:pPr algn="l" marL="518160" indent="-259080" lvl="1">
+            <a:pPr marL="518160" lvl="1" indent="-259080" algn="l">
               <a:lnSpc>
                 <a:spcPts val="3264"/>
               </a:lnSpc>
@@ -3998,7 +4059,7 @@
             </a:r>
           </a:p>
           <a:p>
-            <a:pPr algn="l" marL="518160" indent="-259080" lvl="1">
+            <a:pPr marL="518160" lvl="1" indent="-259080" algn="l">
               <a:lnSpc>
                 <a:spcPts val="3264"/>
               </a:lnSpc>
@@ -4015,19 +4076,7 @@
                 <a:cs typeface="Courier Prime"/>
                 <a:sym typeface="Courier Prime"/>
               </a:rPr>
-              <a:t>G</a:t>
-            </a:r>
-            <a:r>
-              <a:rPr lang="en-US" sz="2400">
-                <a:solidFill>
-                  <a:srgbClr val="FF914D"/>
-                </a:solidFill>
-                <a:latin typeface="Courier Prime"/>
-                <a:ea typeface="Courier Prime"/>
-                <a:cs typeface="Courier Prime"/>
-                <a:sym typeface="Courier Prime"/>
-              </a:rPr>
-              <a:t>estión segura de datos: </a:t>
+              <a:t>Gestión segura de datos: </a:t>
             </a:r>
             <a:r>
               <a:rPr lang="en-US" sz="2400">
@@ -4043,7 +4092,7 @@
             </a:r>
           </a:p>
           <a:p>
-            <a:pPr algn="l" marL="518160" indent="-259080" lvl="1">
+            <a:pPr marL="518160" lvl="1" indent="-259080" algn="l">
               <a:lnSpc>
                 <a:spcPts val="3264"/>
               </a:lnSpc>
@@ -4081,17 +4130,26 @@
                 <a:spcPts val="3264"/>
               </a:lnSpc>
             </a:pPr>
-          </a:p>
-        </p:txBody>
-      </p:sp>
-      <p:sp>
-        <p:nvSpPr>
-          <p:cNvPr name="TextBox 7" id="7"/>
-          <p:cNvSpPr txBox="true"/>
+            <a:endParaRPr lang="en-US" sz="2400">
+              <a:solidFill>
+                <a:srgbClr val="FFFFFF"/>
+              </a:solidFill>
+              <a:latin typeface="Courier Prime"/>
+              <a:ea typeface="Courier Prime"/>
+              <a:cs typeface="Courier Prime"/>
+              <a:sym typeface="Courier Prime"/>
+            </a:endParaRPr>
+          </a:p>
+        </p:txBody>
+      </p:sp>
+      <p:sp>
+        <p:nvSpPr>
+          <p:cNvPr id="7" name="TextBox 7"/>
+          <p:cNvSpPr txBox="1"/>
           <p:nvPr/>
         </p:nvSpPr>
         <p:spPr>
-          <a:xfrm rot="0">
+          <a:xfrm>
             <a:off x="16557135" y="8675370"/>
             <a:ext cx="702165" cy="582930"/>
           </a:xfrm>
@@ -4100,7 +4158,7 @@
           </a:prstGeom>
         </p:spPr>
         <p:txBody>
-          <a:bodyPr anchor="t" rtlCol="false" tIns="0" lIns="0" bIns="0" rIns="0">
+          <a:bodyPr lIns="0" tIns="0" rIns="0" bIns="0" rtlCol="0" anchor="t">
             <a:spAutoFit/>
           </a:bodyPr>
           <a:lstStyle/>
@@ -4134,13 +4192,14 @@
 </file>
 
 <file path=ppt/slides/slide4.xml><?xml version="1.0" encoding="utf-8"?>
-<p:sld xmlns:p="http://schemas.openxmlformats.org/presentationml/2006/main" xmlns:a="http://schemas.openxmlformats.org/drawingml/2006/main" xmlns:r="http://schemas.openxmlformats.org/officeDocument/2006/relationships">
+<p:sld xmlns:a="http://schemas.openxmlformats.org/drawingml/2006/main" xmlns:r="http://schemas.openxmlformats.org/officeDocument/2006/relationships" xmlns:p="http://schemas.openxmlformats.org/presentationml/2006/main">
   <p:cSld>
     <p:bg>
       <p:bgPr>
         <a:solidFill>
           <a:srgbClr val="000101"/>
         </a:solidFill>
+        <a:effectLst/>
       </p:bgPr>
     </p:bg>
     <p:spTree>
@@ -4159,12 +4218,12 @@
       </p:grpSpPr>
       <p:sp>
         <p:nvSpPr>
-          <p:cNvPr name="Freeform 2" id="2"/>
+          <p:cNvPr id="2" name="Freeform 2"/>
           <p:cNvSpPr/>
           <p:nvPr/>
         </p:nvSpPr>
         <p:spPr>
-          <a:xfrm flipH="false" flipV="false" rot="0">
+          <a:xfrm>
             <a:off x="1028700" y="2571937"/>
             <a:ext cx="16327383" cy="5143125"/>
           </a:xfrm>
@@ -4173,9 +4232,9 @@
             <a:gdLst/>
             <a:ahLst/>
             <a:cxnLst/>
-            <a:rect r="r" b="b" t="t" l="l"/>
+            <a:rect l="l" t="t" r="r" b="b"/>
             <a:pathLst>
-              <a:path h="5143125" w="16327383">
+              <a:path w="16327383" h="5143125">
                 <a:moveTo>
                   <a:pt x="0" y="0"/>
                 </a:moveTo>
@@ -4198,19 +4257,26 @@
           <a:blipFill>
             <a:blip r:embed="rId2"/>
             <a:stretch>
-              <a:fillRect l="0" t="0" r="0" b="0"/>
+              <a:fillRect/>
             </a:stretch>
           </a:blipFill>
         </p:spPr>
-      </p:sp>
-      <p:sp>
-        <p:nvSpPr>
-          <p:cNvPr name="TextBox 3" id="3"/>
-          <p:cNvSpPr txBox="true"/>
+        <p:txBody>
+          <a:bodyPr/>
+          <a:lstStyle/>
+          <a:p>
+            <a:endParaRPr lang="en-US"/>
+          </a:p>
+        </p:txBody>
+      </p:sp>
+      <p:sp>
+        <p:nvSpPr>
+          <p:cNvPr id="3" name="TextBox 3"/>
+          <p:cNvSpPr txBox="1"/>
           <p:nvPr/>
         </p:nvSpPr>
         <p:spPr>
-          <a:xfrm rot="0">
+          <a:xfrm>
             <a:off x="1028700" y="1047750"/>
             <a:ext cx="12968292" cy="582930"/>
           </a:xfrm>
@@ -4219,7 +4285,7 @@
           </a:prstGeom>
         </p:spPr>
         <p:txBody>
-          <a:bodyPr anchor="t" rtlCol="false" tIns="0" lIns="0" bIns="0" rIns="0">
+          <a:bodyPr lIns="0" tIns="0" rIns="0" bIns="0" rtlCol="0" anchor="t">
             <a:spAutoFit/>
           </a:bodyPr>
           <a:lstStyle/>
@@ -4246,12 +4312,12 @@
       </p:sp>
       <p:sp>
         <p:nvSpPr>
-          <p:cNvPr name="TextBox 4" id="4"/>
-          <p:cNvSpPr txBox="true"/>
+          <p:cNvPr id="4" name="TextBox 4"/>
+          <p:cNvSpPr txBox="1"/>
           <p:nvPr/>
         </p:nvSpPr>
         <p:spPr>
-          <a:xfrm rot="0">
+          <a:xfrm>
             <a:off x="16557135" y="8675370"/>
             <a:ext cx="702165" cy="582930"/>
           </a:xfrm>
@@ -4260,7 +4326,7 @@
           </a:prstGeom>
         </p:spPr>
         <p:txBody>
-          <a:bodyPr anchor="t" rtlCol="false" tIns="0" lIns="0" bIns="0" rIns="0">
+          <a:bodyPr lIns="0" tIns="0" rIns="0" bIns="0" rtlCol="0" anchor="t">
             <a:spAutoFit/>
           </a:bodyPr>
           <a:lstStyle/>
@@ -4294,13 +4360,14 @@
 </file>
 
 <file path=ppt/slides/slide5.xml><?xml version="1.0" encoding="utf-8"?>
-<p:sld xmlns:p="http://schemas.openxmlformats.org/presentationml/2006/main" xmlns:a="http://schemas.openxmlformats.org/drawingml/2006/main" xmlns:r="http://schemas.openxmlformats.org/officeDocument/2006/relationships">
+<p:sld xmlns:a="http://schemas.openxmlformats.org/drawingml/2006/main" xmlns:r="http://schemas.openxmlformats.org/officeDocument/2006/relationships" xmlns:p="http://schemas.openxmlformats.org/presentationml/2006/main">
   <p:cSld>
     <p:bg>
       <p:bgPr>
         <a:solidFill>
           <a:srgbClr val="20232A"/>
         </a:solidFill>
+        <a:effectLst/>
       </p:bgPr>
     </p:bg>
     <p:spTree>
@@ -4319,12 +4386,12 @@
       </p:grpSpPr>
       <p:sp>
         <p:nvSpPr>
-          <p:cNvPr name="Freeform 2" id="2"/>
+          <p:cNvPr id="2" name="Freeform 2"/>
           <p:cNvSpPr/>
           <p:nvPr/>
         </p:nvSpPr>
         <p:spPr>
-          <a:xfrm flipH="false" flipV="false" rot="0">
+          <a:xfrm>
             <a:off x="4119875" y="2697256"/>
             <a:ext cx="10048249" cy="4892488"/>
           </a:xfrm>
@@ -4333,9 +4400,9 @@
             <a:gdLst/>
             <a:ahLst/>
             <a:cxnLst/>
-            <a:rect r="r" b="b" t="t" l="l"/>
+            <a:rect l="l" t="t" r="r" b="b"/>
             <a:pathLst>
-              <a:path h="4892488" w="10048249">
+              <a:path w="10048249" h="4892488">
                 <a:moveTo>
                   <a:pt x="0" y="0"/>
                 </a:moveTo>
@@ -4358,19 +4425,26 @@
           <a:blipFill>
             <a:blip r:embed="rId2"/>
             <a:stretch>
-              <a:fillRect l="0" t="0" r="0" b="0"/>
+              <a:fillRect/>
             </a:stretch>
           </a:blipFill>
         </p:spPr>
-      </p:sp>
-      <p:sp>
-        <p:nvSpPr>
-          <p:cNvPr name="TextBox 3" id="3"/>
-          <p:cNvSpPr txBox="true"/>
+        <p:txBody>
+          <a:bodyPr/>
+          <a:lstStyle/>
+          <a:p>
+            <a:endParaRPr lang="en-US"/>
+          </a:p>
+        </p:txBody>
+      </p:sp>
+      <p:sp>
+        <p:nvSpPr>
+          <p:cNvPr id="3" name="TextBox 3"/>
+          <p:cNvSpPr txBox="1"/>
           <p:nvPr/>
         </p:nvSpPr>
         <p:spPr>
-          <a:xfrm rot="0">
+          <a:xfrm>
             <a:off x="1028700" y="1047750"/>
             <a:ext cx="10721353" cy="582930"/>
           </a:xfrm>
@@ -4379,7 +4453,7 @@
           </a:prstGeom>
         </p:spPr>
         <p:txBody>
-          <a:bodyPr anchor="t" rtlCol="false" tIns="0" lIns="0" bIns="0" rIns="0">
+          <a:bodyPr lIns="0" tIns="0" rIns="0" bIns="0" rtlCol="0" anchor="t">
             <a:spAutoFit/>
           </a:bodyPr>
           <a:lstStyle/>
@@ -4413,13 +4487,14 @@
 </file>
 
 <file path=ppt/slides/slide6.xml><?xml version="1.0" encoding="utf-8"?>
-<p:sld xmlns:p="http://schemas.openxmlformats.org/presentationml/2006/main" xmlns:a="http://schemas.openxmlformats.org/drawingml/2006/main">
+<p:sld xmlns:a="http://schemas.openxmlformats.org/drawingml/2006/main" xmlns:r="http://schemas.openxmlformats.org/officeDocument/2006/relationships" xmlns:p="http://schemas.openxmlformats.org/presentationml/2006/main">
   <p:cSld>
     <p:bg>
       <p:bgPr>
         <a:solidFill>
           <a:srgbClr val="20232A"/>
         </a:solidFill>
+        <a:effectLst/>
       </p:bgPr>
     </p:bg>
     <p:spTree>
@@ -4438,12 +4513,12 @@
       </p:grpSpPr>
       <p:sp>
         <p:nvSpPr>
-          <p:cNvPr name="TextBox 2" id="2"/>
-          <p:cNvSpPr txBox="true"/>
+          <p:cNvPr id="2" name="TextBox 2"/>
+          <p:cNvSpPr txBox="1"/>
           <p:nvPr/>
         </p:nvSpPr>
         <p:spPr>
-          <a:xfrm rot="0">
+          <a:xfrm>
             <a:off x="1028700" y="1047750"/>
             <a:ext cx="10577589" cy="582930"/>
           </a:xfrm>
@@ -4452,7 +4527,7 @@
           </a:prstGeom>
         </p:spPr>
         <p:txBody>
-          <a:bodyPr anchor="t" rtlCol="false" tIns="0" lIns="0" bIns="0" rIns="0">
+          <a:bodyPr lIns="0" tIns="0" rIns="0" bIns="0" rtlCol="0" anchor="t">
             <a:spAutoFit/>
           </a:bodyPr>
           <a:lstStyle/>
@@ -4479,12 +4554,12 @@
       </p:sp>
       <p:sp>
         <p:nvSpPr>
-          <p:cNvPr name="TextBox 3" id="3"/>
-          <p:cNvSpPr txBox="true"/>
+          <p:cNvPr id="3" name="TextBox 3"/>
+          <p:cNvSpPr txBox="1"/>
           <p:nvPr/>
         </p:nvSpPr>
         <p:spPr>
-          <a:xfrm rot="0">
+          <a:xfrm>
             <a:off x="16557135" y="8675370"/>
             <a:ext cx="702165" cy="582930"/>
           </a:xfrm>
@@ -4493,7 +4568,7 @@
           </a:prstGeom>
         </p:spPr>
         <p:txBody>
-          <a:bodyPr anchor="t" rtlCol="false" tIns="0" lIns="0" bIns="0" rIns="0">
+          <a:bodyPr lIns="0" tIns="0" rIns="0" bIns="0" rtlCol="0" anchor="t">
             <a:spAutoFit/>
           </a:bodyPr>
           <a:lstStyle/>
@@ -4518,6 +4593,51 @@
           </a:p>
         </p:txBody>
       </p:sp>
+      <p:sp>
+        <p:nvSpPr>
+          <p:cNvPr id="7" name="CuadroTexto 6">
+            <a:extLst>
+              <a:ext uri="{FF2B5EF4-FFF2-40B4-BE49-F238E27FC236}">
+                <a16:creationId xmlns:a16="http://schemas.microsoft.com/office/drawing/2014/main" id="{11888B22-EB02-9A4F-2950-BF7BD43AF72B}"/>
+              </a:ext>
+            </a:extLst>
+          </p:cNvPr>
+          <p:cNvSpPr txBox="1"/>
+          <p:nvPr/>
+        </p:nvSpPr>
+        <p:spPr>
+          <a:xfrm>
+            <a:off x="4944836" y="4681835"/>
+            <a:ext cx="8398328" cy="923330"/>
+          </a:xfrm>
+          <a:prstGeom prst="rect">
+            <a:avLst/>
+          </a:prstGeom>
+          <a:noFill/>
+        </p:spPr>
+        <p:txBody>
+          <a:bodyPr wrap="square">
+            <a:spAutoFit/>
+          </a:bodyPr>
+          <a:lstStyle/>
+          <a:p>
+            <a:r>
+              <a:rPr lang="es-PA" sz="5400" b="1" dirty="0">
+                <a:solidFill>
+                  <a:schemeClr val="bg1"/>
+                </a:solidFill>
+                <a:hlinkClick r:id="rId2"/>
+              </a:rPr>
+              <a:t>URL a repositorio en GitHub</a:t>
+            </a:r>
+            <a:endParaRPr lang="en-US" sz="5400" b="1" dirty="0">
+              <a:solidFill>
+                <a:schemeClr val="bg1"/>
+              </a:solidFill>
+            </a:endParaRPr>
+          </a:p>
+        </p:txBody>
+      </p:sp>
     </p:spTree>
   </p:cSld>
   <p:clrMapOvr>
@@ -4527,13 +4647,14 @@
 </file>
 
 <file path=ppt/slides/slide7.xml><?xml version="1.0" encoding="utf-8"?>
-<p:sld xmlns:p="http://schemas.openxmlformats.org/presentationml/2006/main" xmlns:a="http://schemas.openxmlformats.org/drawingml/2006/main">
+<p:sld xmlns:a="http://schemas.openxmlformats.org/drawingml/2006/main" xmlns:r="http://schemas.openxmlformats.org/officeDocument/2006/relationships" xmlns:p="http://schemas.openxmlformats.org/presentationml/2006/main">
   <p:cSld>
     <p:bg>
       <p:bgPr>
         <a:solidFill>
           <a:srgbClr val="20232A"/>
         </a:solidFill>
+        <a:effectLst/>
       </p:bgPr>
     </p:bg>
     <p:spTree>
@@ -4552,7 +4673,7 @@
       </p:grpSpPr>
       <p:sp>
         <p:nvSpPr>
-          <p:cNvPr name="AutoShape 2" id="2"/>
+          <p:cNvPr id="2" name="AutoShape 2"/>
           <p:cNvSpPr/>
           <p:nvPr/>
         </p:nvSpPr>
@@ -4564,24 +4685,31 @@
           <a:prstGeom prst="line">
             <a:avLst/>
           </a:prstGeom>
-          <a:ln cap="flat" w="95250">
+          <a:ln w="95250" cap="flat">
             <a:solidFill>
               <a:srgbClr val="2D2D35"/>
             </a:solidFill>
             <a:prstDash val="solid"/>
-            <a:headEnd type="none" len="sm" w="sm"/>
-            <a:tailEnd type="none" len="sm" w="sm"/>
+            <a:headEnd type="none" w="sm" len="sm"/>
+            <a:tailEnd type="none" w="sm" len="sm"/>
           </a:ln>
         </p:spPr>
-      </p:sp>
-      <p:sp>
-        <p:nvSpPr>
-          <p:cNvPr name="TextBox 3" id="3"/>
-          <p:cNvSpPr txBox="true"/>
+        <p:txBody>
+          <a:bodyPr/>
+          <a:lstStyle/>
+          <a:p>
+            <a:endParaRPr lang="en-US"/>
+          </a:p>
+        </p:txBody>
+      </p:sp>
+      <p:sp>
+        <p:nvSpPr>
+          <p:cNvPr id="3" name="TextBox 3"/>
+          <p:cNvSpPr txBox="1"/>
           <p:nvPr/>
         </p:nvSpPr>
         <p:spPr>
-          <a:xfrm rot="0">
+          <a:xfrm>
             <a:off x="2537186" y="3245316"/>
             <a:ext cx="10718760" cy="1324177"/>
           </a:xfrm>
@@ -4590,7 +4718,7 @@
           </a:prstGeom>
         </p:spPr>
         <p:txBody>
-          <a:bodyPr anchor="t" rtlCol="false" tIns="0" lIns="0" bIns="0" rIns="0">
+          <a:bodyPr lIns="0" tIns="0" rIns="0" bIns="0" rtlCol="0" anchor="t">
             <a:spAutoFit/>
           </a:bodyPr>
           <a:lstStyle/>
@@ -4617,12 +4745,12 @@
       </p:sp>
       <p:sp>
         <p:nvSpPr>
-          <p:cNvPr name="TextBox 4" id="4"/>
-          <p:cNvSpPr txBox="true"/>
+          <p:cNvPr id="4" name="TextBox 4"/>
+          <p:cNvSpPr txBox="1"/>
           <p:nvPr/>
         </p:nvSpPr>
         <p:spPr>
-          <a:xfrm rot="0">
+          <a:xfrm>
             <a:off x="2415791" y="6536903"/>
             <a:ext cx="2471972" cy="1607392"/>
           </a:xfrm>
@@ -4631,7 +4759,7 @@
           </a:prstGeom>
         </p:spPr>
         <p:txBody>
-          <a:bodyPr anchor="t" rtlCol="false" tIns="0" lIns="0" bIns="0" rIns="0">
+          <a:bodyPr lIns="0" tIns="0" rIns="0" bIns="0" rtlCol="0" anchor="t">
             <a:spAutoFit/>
           </a:bodyPr>
           <a:lstStyle/>
